--- a/docs/pptx/auc3/ritu-auc3-egfr-ratio-hist.pptx
+++ b/docs/pptx/auc3/ritu-auc3-egfr-ratio-hist.pptx
@@ -2271,7 +2271,7 @@
           </p:nvSpPr>
           <p:spPr>
             <a:xfrm>
-              <a:off x="994649" y="5026047"/>
+              <a:off x="994649" y="5028998"/>
               <a:ext cx="7603582" cy="0"/>
             </a:xfrm>
             <a:custGeom>
@@ -2314,7 +2314,7 @@
           </p:nvSpPr>
           <p:spPr>
             <a:xfrm>
-              <a:off x="994649" y="4182040"/>
+              <a:off x="994649" y="4190894"/>
               <a:ext cx="7603582" cy="0"/>
             </a:xfrm>
             <a:custGeom>
@@ -2357,7 +2357,7 @@
           </p:nvSpPr>
           <p:spPr>
             <a:xfrm>
-              <a:off x="994649" y="3338033"/>
+              <a:off x="994649" y="3352789"/>
               <a:ext cx="7603582" cy="0"/>
             </a:xfrm>
             <a:custGeom>
@@ -2400,7 +2400,7 @@
           </p:nvSpPr>
           <p:spPr>
             <a:xfrm>
-              <a:off x="994649" y="2494027"/>
+              <a:off x="994649" y="2514684"/>
               <a:ext cx="7603582" cy="0"/>
             </a:xfrm>
             <a:custGeom>
@@ -2787,7 +2787,7 @@
           </p:nvSpPr>
           <p:spPr>
             <a:xfrm>
-              <a:off x="994649" y="4604044"/>
+              <a:off x="994649" y="4609946"/>
               <a:ext cx="7603582" cy="0"/>
             </a:xfrm>
             <a:custGeom>
@@ -2830,7 +2830,7 @@
           </p:nvSpPr>
           <p:spPr>
             <a:xfrm>
-              <a:off x="994649" y="3760037"/>
+              <a:off x="994649" y="3771841"/>
               <a:ext cx="7603582" cy="0"/>
             </a:xfrm>
             <a:custGeom>
@@ -2873,7 +2873,7 @@
           </p:nvSpPr>
           <p:spPr>
             <a:xfrm>
-              <a:off x="994649" y="2916030"/>
+              <a:off x="994649" y="2933736"/>
               <a:ext cx="7603582" cy="0"/>
             </a:xfrm>
             <a:custGeom>
@@ -2916,7 +2916,7 @@
           </p:nvSpPr>
           <p:spPr>
             <a:xfrm>
-              <a:off x="994649" y="2072023"/>
+              <a:off x="994649" y="2095632"/>
               <a:ext cx="7603582" cy="0"/>
             </a:xfrm>
             <a:custGeom>
@@ -3287,8 +3287,8 @@
           </p:nvSpPr>
           <p:spPr>
             <a:xfrm>
-              <a:off x="2492324" y="3677407"/>
-              <a:ext cx="576029" cy="1770643"/>
+              <a:off x="2492324" y="3795450"/>
+              <a:ext cx="576029" cy="1652600"/>
             </a:xfrm>
             <a:prstGeom prst="rect">
               <a:avLst/>
@@ -4146,7 +4146,7 @@
           </p:nvSpPr>
           <p:spPr>
             <a:xfrm>
-              <a:off x="835933" y="4553066"/>
+              <a:off x="835933" y="4558968"/>
               <a:ext cx="79004" cy="101955"/>
             </a:xfrm>
             <a:prstGeom prst="rect">
@@ -4192,7 +4192,7 @@
           </p:nvSpPr>
           <p:spPr>
             <a:xfrm>
-              <a:off x="756929" y="3709059"/>
+              <a:off x="756929" y="3720863"/>
               <a:ext cx="158008" cy="101955"/>
             </a:xfrm>
             <a:prstGeom prst="rect">
@@ -4238,7 +4238,7 @@
           </p:nvSpPr>
           <p:spPr>
             <a:xfrm>
-              <a:off x="756929" y="2865052"/>
+              <a:off x="756929" y="2882759"/>
               <a:ext cx="158008" cy="101955"/>
             </a:xfrm>
             <a:prstGeom prst="rect">
@@ -4284,7 +4284,7 @@
           </p:nvSpPr>
           <p:spPr>
             <a:xfrm>
-              <a:off x="756929" y="2021045"/>
+              <a:off x="756929" y="2044654"/>
               <a:ext cx="158008" cy="101955"/>
             </a:xfrm>
             <a:prstGeom prst="rect">
